--- a/docs/decks/BrokerVerse_Underwriter_Guide.pptx
+++ b/docs/decks/BrokerVerse_Underwriter_Guide.pptx
@@ -3274,7 +3274,7 @@
                 </a:solidFill>
                 <a:latin typeface="Calibri"/>
               </a:rPr>
-              <a:t>BDO Insure (BDOI) insurance broking · Philippines · PHP</a:t>
+              <a:t>BrokerVerse OOTB · insurance broking · Philippines · PHP</a:t>
             </a:r>
           </a:p>
         </p:txBody>
@@ -3821,7 +3821,7 @@
                 </a:solidFill>
                 <a:latin typeface="Calibri"/>
               </a:rPr>
-              <a:t>Home (business overview dashboard)</a:t>
+              <a:t>Executive Dashboard</a:t>
             </a:r>
           </a:p>
         </p:txBody>
@@ -4188,7 +4188,7 @@
                 </a:solidFill>
                 <a:latin typeface="Calibri"/>
               </a:rPr>
-              <a:t>Screen from the recorded end-to-end run — Renewal order summary (net 32,005.00, gross 40,086.27) — jose.uw</a:t>
+              <a:t>Live screen — Row actions on an expired policy: Claim, Renewal, Reminder — signed in as jose.uw</a:t>
             </a:r>
           </a:p>
         </p:txBody>
@@ -4269,7 +4269,7 @@
                 </a:solidFill>
                 <a:latin typeface="Calibri"/>
               </a:rPr>
-              <a:t>Policy &gt; Renew &gt; Order Summary</a:t>
+              <a:t>Operations &gt; Renewals &gt; Renewal Policy &gt; … &gt; Renewal</a:t>
             </a:r>
           </a:p>
         </p:txBody>
@@ -4320,7 +4320,7 @@
                 </a:solidFill>
                 <a:latin typeface="Calibri"/>
               </a:rPr>
-              <a:t>renewal quote priced from the expiring policy.</a:t>
+              <a:t>renewal quote priced from the expiring policy; own damage rate from the motor tariff.</a:t>
             </a:r>
           </a:p>
           <a:p>
@@ -7771,7 +7771,7 @@
                 </a:solidFill>
                 <a:latin typeface="Calibri"/>
               </a:rPr>
-              <a:t>REPORTS &gt; OPERATIONAL / FINANCIAL</a:t>
+              <a:t>REPORTS &gt; ALL REPORTS</a:t>
             </a:r>
           </a:p>
         </p:txBody>
@@ -8265,7 +8265,7 @@
                 </a:solidFill>
                 <a:latin typeface="Calibri"/>
               </a:rPr>
-              <a:t>Ten reports in your catalogue.</a:t>
+              <a:t>Ten reports in Reports &gt; All Reports.</a:t>
             </a:r>
           </a:p>
         </p:txBody>
@@ -8418,7 +8418,7 @@
                           </a:solidFill>
                           <a:latin typeface="Calibri"/>
                         </a:rPr>
-                        <a:t>Reports &gt; Operational &gt; Production</a:t>
+                        <a:t>All Reports; Operational &gt; Production</a:t>
                       </a:r>
                     </a:p>
                   </a:txBody>
@@ -8486,7 +8486,7 @@
                           </a:solidFill>
                           <a:latin typeface="Calibri"/>
                         </a:rPr>
-                        <a:t>Reports &gt; Operational &gt; Claims</a:t>
+                        <a:t>All Reports; Operational &gt; Claims</a:t>
                       </a:r>
                     </a:p>
                   </a:txBody>
@@ -8554,7 +8554,7 @@
                           </a:solidFill>
                           <a:latin typeface="Calibri"/>
                         </a:rPr>
-                        <a:t>Reports &gt; Operational &gt; Renewal</a:t>
+                        <a:t>All Reports; Operational &gt; Renewal</a:t>
                       </a:r>
                     </a:p>
                   </a:txBody>
@@ -8622,7 +8622,7 @@
                           </a:solidFill>
                           <a:latin typeface="Calibri"/>
                         </a:rPr>
-                        <a:t>Reports &gt; Operational &gt; Remittance</a:t>
+                        <a:t>All Reports; Operational &gt; Remittance</a:t>
                       </a:r>
                     </a:p>
                   </a:txBody>
@@ -8690,7 +8690,7 @@
                           </a:solidFill>
                           <a:latin typeface="Calibri"/>
                         </a:rPr>
-                        <a:t>Reports &gt; Operational &gt; Broker Commission</a:t>
+                        <a:t>All Reports; Operational &gt; Broker Commission</a:t>
                       </a:r>
                     </a:p>
                   </a:txBody>
@@ -8758,7 +8758,7 @@
                           </a:solidFill>
                           <a:latin typeface="Calibri"/>
                         </a:rPr>
-                        <a:t>Executive Dashboard &gt; Export Report</a:t>
+                        <a:t>Reports &gt; All Reports</a:t>
                       </a:r>
                     </a:p>
                   </a:txBody>
@@ -8826,7 +8826,7 @@
                           </a:solidFill>
                           <a:latin typeface="Calibri"/>
                         </a:rPr>
-                        <a:t>Executive Dashboard &gt; Export Report</a:t>
+                        <a:t>Reports &gt; All Reports</a:t>
                       </a:r>
                     </a:p>
                   </a:txBody>
@@ -8894,7 +8894,7 @@
                           </a:solidFill>
                           <a:latin typeface="Calibri"/>
                         </a:rPr>
-                        <a:t>Claims Dashboard &gt; Export Report</a:t>
+                        <a:t>Reports &gt; All Reports</a:t>
                       </a:r>
                     </a:p>
                   </a:txBody>
@@ -8962,7 +8962,7 @@
                           </a:solidFill>
                           <a:latin typeface="Calibri"/>
                         </a:rPr>
-                        <a:t>Leads &gt; Generate Report</a:t>
+                        <a:t>Reports &gt; All Reports</a:t>
                       </a:r>
                     </a:p>
                   </a:txBody>
@@ -9030,7 +9030,7 @@
                           </a:solidFill>
                           <a:latin typeface="Calibri"/>
                         </a:rPr>
-                        <a:t>Reinsurance &gt; Cession Tracking</a:t>
+                        <a:t>Reports &gt; All Reports</a:t>
                       </a:r>
                     </a:p>
                   </a:txBody>
@@ -11081,7 +11081,7 @@
                 </a:solidFill>
                 <a:latin typeface="Calibri"/>
               </a:rPr>
-              <a:t>Some quote lists (policy types, vehicle details, signatories) are fixed lists until linked to the masters.</a:t>
+              <a:t>Your session is kept in the browser’s local storage: sign out on shared computers and keep the browser up to date.</a:t>
             </a:r>
           </a:p>
           <a:p>
@@ -11102,7 +11102,7 @@
                 </a:solidFill>
                 <a:latin typeface="Calibri"/>
               </a:rPr>
-              <a:t>CTPL treatment (separate policy or part of the premium) is awaiting a business decision.</a:t>
+              <a:t>Two-factor set-up shows a setup key and an app link, but no QR code: type the key into the authenticator app.</a:t>
             </a:r>
           </a:p>
           <a:p>
@@ -11123,7 +11123,7 @@
                 </a:solidFill>
                 <a:latin typeface="Calibri"/>
               </a:rPr>
-              <a:t>Renewal quotation linking to the expiring policy is being finalised; check insurer, client and vehicle.</a:t>
+              <a:t>Screens are in English or Thai; Filipino is configured but has no translation yet.</a:t>
             </a:r>
           </a:p>
           <a:p>
@@ -11144,28 +11144,7 @@
                 </a:solidFill>
                 <a:latin typeface="Calibri"/>
               </a:rPr>
-              <a:t>Endorsement is still offered on expired policies: do not use it there.</a:t>
-            </a:r>
-          </a:p>
-          <a:p>
-            <a:pPr marL="201168" indent="-182880">
-              <a:spcAft>
-                <a:spcPts val="800"/>
-              </a:spcAft>
-              <a:buClr>
-                <a:srgbClr val="5B6778"/>
-              </a:buClr>
-              <a:buFont typeface="Arial"/>
-              <a:buChar char="•"/>
-            </a:pPr>
-            <a:r>
-              <a:rPr sz="1500">
-                <a:solidFill>
-                  <a:srgbClr val="1F2937"/>
-                </a:solidFill>
-                <a:latin typeface="Calibri"/>
-              </a:rPr>
-              <a:t>The Clients list can fail to open for this role in the current build.</a:t>
+              <a:t>Treaties are added by administrators (Master &gt; Reinsurance Treaty); Add Treaty is shown only to them.</a:t>
             </a:r>
           </a:p>
         </p:txBody>
@@ -11635,7 +11614,7 @@
                 </a:solidFill>
                 <a:latin typeface="Calibri"/>
               </a:rPr>
-              <a:t>&lt;to be confirmed by BDOI&gt;</a:t>
+              <a:t>&lt;service desk to be confirmed&gt;</a:t>
             </a:r>
           </a:p>
         </p:txBody>
@@ -12428,7 +12407,7 @@
                 </a:solidFill>
                 <a:latin typeface="Calibri"/>
               </a:rPr>
-              <a:t>User name jose.uw. Lands on Home; the Underwriting Dashboard is in the Dashboard menu.</a:t>
+              <a:t>User name jose.uw. Lands on the Executive Dashboard; the Underwriting Dashboard is in the Dashboard menu.</a:t>
             </a:r>
           </a:p>
         </p:txBody>
@@ -14183,6 +14162,27 @@
         <p:txBody>
           <a:bodyPr wrap="square" lIns="18288" rIns="18288" tIns="18288" bIns="18288"/>
           <a:lstStyle/>
+          <a:p>
+            <a:pPr marL="201168" indent="-182880">
+              <a:spcAft>
+                <a:spcPts val="200"/>
+              </a:spcAft>
+              <a:buClr>
+                <a:srgbClr val="1E88E5"/>
+              </a:buClr>
+              <a:buFont typeface="Arial"/>
+              <a:buChar char="•"/>
+            </a:pPr>
+            <a:r>
+              <a:rPr sz="1100">
+                <a:solidFill>
+                  <a:srgbClr val="1F2937"/>
+                </a:solidFill>
+                <a:latin typeface="Calibri"/>
+              </a:rPr>
+              <a:t>All Reports (10 reports)</a:t>
+            </a:r>
+          </a:p>
           <a:p>
             <a:pPr marL="201168" indent="-182880">
               <a:spcAft>
